--- a/assets/container-report-template.pptx
+++ b/assets/container-report-template.pptx
@@ -3227,7 +3227,7 @@
                           </a:solidFill>
                           <a:latin typeface="Arial"/>
                         </a:rPr>
-                        <a:t>Nombre de contenants réparés</a:t>
+                        <a:t>Nombre d’interventions</a:t>
                       </a:r>
                     </a:p>
                   </a:txBody>
